--- a/slides/usecases/06_Anomalien.pptx
+++ b/slides/usecases/06_Anomalien.pptx
@@ -7744,7 +7744,7 @@
                   <a:srgbClr val="404040"/>
                 </a:solidFill>
               </a:rPr>
-              <a:t>A2 auffällige Fahrten: schatten, da kein Label vorliegt.</a:t>
+              <a:t>A2 auffällige Fahrten: probebetrieb, da kein Label vorliegt.</a:t>
             </a:r>
           </a:p>
           <a:p>
